--- a/open-research-tools/zotero/zotero-slides.pptx
+++ b/open-research-tools/zotero/zotero-slides.pptx
@@ -11688,7 +11688,7 @@
             </a:r>
             <a:r>
               <a:rPr i="1"/>
-              <a:t>Citing made simple: A practical guide for Zotero</a:t>
+              <a:t>Introduction to Zotero</a:t>
             </a:r>
             <a:r>
               <a:rPr/>

--- a/open-research-tools/zotero/zotero-slides.pptx
+++ b/open-research-tools/zotero/zotero-slides.pptx
@@ -7328,7 +7328,7 @@
             </a:pPr>
             <a:r>
               <a:rPr/>
-              <a:t>30/09/2026</a:t>
+              <a:t>01/10/2026</a:t>
             </a:r>
           </a:p>
         </p:txBody>

--- a/open-research-tools/zotero/zotero-slides.pptx
+++ b/open-research-tools/zotero/zotero-slides.pptx
@@ -7328,7 +7328,7 @@
             </a:pPr>
             <a:r>
               <a:rPr/>
-              <a:t>01/10/2026</a:t>
+              <a:t>05/10/2026</a:t>
             </a:r>
           </a:p>
         </p:txBody>

--- a/open-research-tools/zotero/zotero-slides.pptx
+++ b/open-research-tools/zotero/zotero-slides.pptx
@@ -7328,7 +7328,7 @@
             </a:pPr>
             <a:r>
               <a:rPr/>
-              <a:t>05/10/2026</a:t>
+              <a:t>08/10/2026</a:t>
             </a:r>
           </a:p>
         </p:txBody>

--- a/open-research-tools/zotero/zotero-slides.pptx
+++ b/open-research-tools/zotero/zotero-slides.pptx
@@ -7328,7 +7328,7 @@
             </a:pPr>
             <a:r>
               <a:rPr/>
-              <a:t>08/10/2026</a:t>
+              <a:t>12/10/2026</a:t>
             </a:r>
           </a:p>
         </p:txBody>

--- a/open-research-tools/zotero/zotero-slides.pptx
+++ b/open-research-tools/zotero/zotero-slides.pptx
@@ -7328,7 +7328,7 @@
             </a:pPr>
             <a:r>
               <a:rPr/>
-              <a:t>12/10/2026</a:t>
+              <a:t>13/10/2026</a:t>
             </a:r>
           </a:p>
         </p:txBody>

--- a/open-research-tools/zotero/zotero-slides.pptx
+++ b/open-research-tools/zotero/zotero-slides.pptx
@@ -7328,7 +7328,7 @@
             </a:pPr>
             <a:r>
               <a:rPr/>
-              <a:t>13/10/2026</a:t>
+              <a:t>14/10/2026</a:t>
             </a:r>
           </a:p>
         </p:txBody>

--- a/open-research-tools/zotero/zotero-slides.pptx
+++ b/open-research-tools/zotero/zotero-slides.pptx
@@ -7328,7 +7328,7 @@
             </a:pPr>
             <a:r>
               <a:rPr/>
-              <a:t>14/10/2026</a:t>
+              <a:t>19/10/2026</a:t>
             </a:r>
           </a:p>
         </p:txBody>

--- a/open-research-tools/zotero/zotero-slides.pptx
+++ b/open-research-tools/zotero/zotero-slides.pptx
@@ -7328,7 +7328,7 @@
             </a:pPr>
             <a:r>
               <a:rPr/>
-              <a:t>19/10/2026</a:t>
+              <a:t>22/10/2026</a:t>
             </a:r>
           </a:p>
         </p:txBody>

--- a/open-research-tools/zotero/zotero-slides.pptx
+++ b/open-research-tools/zotero/zotero-slides.pptx
@@ -7328,7 +7328,7 @@
             </a:pPr>
             <a:r>
               <a:rPr/>
-              <a:t>22/10/2026</a:t>
+              <a:t>26/10/2026</a:t>
             </a:r>
           </a:p>
         </p:txBody>

--- a/open-research-tools/zotero/zotero-slides.pptx
+++ b/open-research-tools/zotero/zotero-slides.pptx
@@ -7328,7 +7328,7 @@
             </a:pPr>
             <a:r>
               <a:rPr/>
-              <a:t>26/10/2026</a:t>
+              <a:t>29/10/2026</a:t>
             </a:r>
           </a:p>
         </p:txBody>
